--- a/pp/ShopInk.pptx
+++ b/pp/ShopInk.pptx
@@ -8152,7 +8152,7 @@
                 <a:cs typeface="Arial" panose="020B0604020202020204" pitchFamily="34" charset="0"/>
                 <a:sym typeface="+mn-ea"/>
               </a:rPr>
-              <a:t>hòn thiện</a:t>
+              <a:t>hoàn thiện</a:t>
             </a:r>
             <a:endParaRPr lang="en-US" sz="1600" dirty="0">
               <a:solidFill>
@@ -9366,7 +9366,7 @@
               <a:rPr lang="en-US">
                 <a:latin typeface="+mj-lt"/>
               </a:rPr>
-              <a:t>Product</a:t>
+              <a:t>Demo</a:t>
             </a:r>
             <a:endParaRPr lang="en-US">
               <a:latin typeface="+mj-lt"/>
@@ -9471,7 +9471,7 @@
               <a:rPr lang="en-US" altLang="en-GB">
                 <a:latin typeface="+mj-lt"/>
               </a:rPr>
-              <a:t>Advantages and disadvantages of the website</a:t>
+              <a:t>the website</a:t>
             </a:r>
             <a:endParaRPr lang="en-US" altLang="en-GB">
               <a:latin typeface="+mj-lt"/>
@@ -9493,7 +9493,7 @@
         </p:nvSpPr>
         <p:spPr>
           <a:xfrm>
-            <a:off x="680720" y="-768985"/>
+            <a:off x="680720" y="167640"/>
             <a:ext cx="10829925" cy="2277110"/>
           </a:xfrm>
           <a:prstGeom prst="rect">
@@ -9736,7 +9736,7 @@
           <a:p>
             <a:r>
               <a:rPr lang="en-US" altLang="en-GB"/>
-              <a:t>Advantages</a:t>
+              <a:t>Future features</a:t>
             </a:r>
             <a:endParaRPr lang="en-US" altLang="en-GB"/>
           </a:p>
